--- a/system-design-101/vi/lessons/sd-14-034/slides/sd-14-034.pptx
+++ b/system-design-101/vi/lessons/sd-14-034/slides/sd-14-034.pptx
@@ -4746,7 +4746,7 @@
               <a:buNone/>
             </a:pPr>
             <a:r>
-              <a:rPr lang="en-US" sz="2100" dirty="0" spc="-22" kern="0">
+              <a:rPr lang="en-US" sz="2100" dirty="0" spc="-2" kern="0">
                 <a:solidFill>
                   <a:srgbClr val="D8D3C4"/>
                 </a:solidFill>
@@ -4754,7 +4754,51 @@
                 <a:ea typeface="Be Vietnam Pro" pitchFamily="34" charset="-122"/>
                 <a:cs typeface="Be Vietnam Pro" pitchFamily="34" charset="-120"/>
               </a:rPr>
-              <a:t>trộn</a:t>
+              <a:t>mã</a:t>
+            </a:r>
+            <a:r>
+              <a:rPr lang="en-US" sz="2100" dirty="0" spc="-18" kern="0">
+                <a:solidFill>
+                  <a:srgbClr val="D8D3C4"/>
+                </a:solidFill>
+                <a:latin typeface="Be Vietnam Pro" pitchFamily="34" charset="0"/>
+                <a:ea typeface="Be Vietnam Pro" pitchFamily="34" charset="-122"/>
+                <a:cs typeface="Be Vietnam Pro" pitchFamily="34" charset="-120"/>
+              </a:rPr>
+              <a:t> xác</a:t>
+            </a:r>
+            <a:r>
+              <a:rPr lang="en-US" sz="2100" dirty="0" spc="5" kern="0">
+                <a:solidFill>
+                  <a:srgbClr val="D8D3C4"/>
+                </a:solidFill>
+                <a:latin typeface="Be Vietnam Pro" pitchFamily="34" charset="0"/>
+                <a:ea typeface="Be Vietnam Pro" pitchFamily="34" charset="-122"/>
+                <a:cs typeface="Be Vietnam Pro" pitchFamily="34" charset="-120"/>
+              </a:rPr>
+              <a:t> thực,</a:t>
+            </a:r>
+            <a:r>
+              <a:rPr lang="en-US" sz="2100" dirty="0" spc="16" kern="0">
+                <a:solidFill>
+                  <a:srgbClr val="D8D3C4"/>
+                </a:solidFill>
+                <a:latin typeface="Be Vietnam Pro" pitchFamily="34" charset="0"/>
+                <a:ea typeface="Be Vietnam Pro" pitchFamily="34" charset="-122"/>
+                <a:cs typeface="Be Vietnam Pro" pitchFamily="34" charset="-120"/>
+              </a:rPr>
+              <a:t> dựng</a:t>
+            </a:r>
+            <a:r>
+              <a:rPr lang="en-US" sz="2100" dirty="0" spc="-17" kern="0">
+                <a:solidFill>
+                  <a:srgbClr val="D8D3C4"/>
+                </a:solidFill>
+                <a:latin typeface="Be Vietnam Pro" pitchFamily="34" charset="0"/>
+                <a:ea typeface="Be Vietnam Pro" pitchFamily="34" charset="-122"/>
+                <a:cs typeface="Be Vietnam Pro" pitchFamily="34" charset="-120"/>
+              </a:rPr>
+              <a:t> trên</a:t>
             </a:r>
             <a:r>
               <a:rPr lang="en-US" sz="2100" dirty="0" spc="-2" kern="0">
@@ -4765,10 +4809,10 @@
                 <a:ea typeface="Be Vietnam Pro" pitchFamily="34" charset="-122"/>
                 <a:cs typeface="Be Vietnam Pro" pitchFamily="34" charset="-120"/>
               </a:rPr>
-              <a:t> bí</a:t>
-            </a:r>
-            <a:r>
-              <a:rPr lang="en-US" sz="2100" dirty="0" spc="-13" kern="0">
+              <a:t> hàm</a:t>
+            </a:r>
+            <a:r>
+              <a:rPr lang="en-US" sz="2100" dirty="0" spc="-6" kern="0">
                 <a:solidFill>
                   <a:srgbClr val="D8D3C4"/>
                 </a:solidFill>
@@ -4776,10 +4820,10 @@
                 <a:ea typeface="Be Vietnam Pro" pitchFamily="34" charset="-122"/>
                 <a:cs typeface="Be Vietnam Pro" pitchFamily="34" charset="-120"/>
               </a:rPr>
-              <a:t> mật</a:t>
-            </a:r>
-            <a:r>
-              <a:rPr lang="en-US" sz="2100" dirty="0" spc="-14" kern="0">
+              <a:t> băm</a:t>
+            </a:r>
+            <a:r>
+              <a:rPr lang="en-US" sz="2100" dirty="0" spc="0" kern="0">
                 <a:solidFill>
                   <a:srgbClr val="D8D3C4"/>
                 </a:solidFill>
@@ -4787,7 +4831,7 @@
                 <a:ea typeface="Be Vietnam Pro" pitchFamily="34" charset="-122"/>
                 <a:cs typeface="Be Vietnam Pro" pitchFamily="34" charset="-120"/>
               </a:rPr>
-              <a:t> vào</a:t>
+              <a:t> 256</a:t>
             </a:r>
             <a:r>
               <a:rPr lang="en-US" sz="2100" dirty="0" spc="-2" kern="0">
@@ -4798,84 +4842,7 @@
                 <a:ea typeface="Be Vietnam Pro" pitchFamily="34" charset="-122"/>
                 <a:cs typeface="Be Vietnam Pro" pitchFamily="34" charset="-120"/>
               </a:rPr>
-              <a:t> dữ</a:t>
-            </a:r>
-            <a:r>
-              <a:rPr lang="en-US" sz="2100" dirty="0" spc="1" kern="0">
-                <a:solidFill>
-                  <a:srgbClr val="D8D3C4"/>
-                </a:solidFill>
-                <a:latin typeface="Be Vietnam Pro" pitchFamily="34" charset="0"/>
-                <a:ea typeface="Be Vietnam Pro" pitchFamily="34" charset="-122"/>
-                <a:cs typeface="Be Vietnam Pro" pitchFamily="34" charset="-120"/>
-              </a:rPr>
-              <a:t> liệu</a:t>
-            </a:r>
-            <a:r>
-              <a:rPr lang="en-US" sz="2100" dirty="0" spc="-23" kern="0">
-                <a:solidFill>
-                  <a:srgbClr val="D8D3C4"/>
-                </a:solidFill>
-                <a:latin typeface="Be Vietnam Pro" pitchFamily="34" charset="0"/>
-                <a:ea typeface="Be Vietnam Pro" pitchFamily="34" charset="-122"/>
-                <a:cs typeface="Be Vietnam Pro" pitchFamily="34" charset="-120"/>
-              </a:rPr>
-              <a:t> rồi</a:t>
-            </a:r>
-            <a:r>
-              <a:rPr lang="en-US" sz="2100" dirty="0" spc="-6" kern="0">
-                <a:solidFill>
-                  <a:srgbClr val="D8D3C4"/>
-                </a:solidFill>
-                <a:latin typeface="Be Vietnam Pro" pitchFamily="34" charset="0"/>
-                <a:ea typeface="Be Vietnam Pro" pitchFamily="34" charset="-122"/>
-                <a:cs typeface="Be Vietnam Pro" pitchFamily="34" charset="-120"/>
-              </a:rPr>
-              <a:t> băm</a:t>
-            </a:r>
-            <a:r>
-              <a:rPr lang="en-US" sz="2100" dirty="0" spc="-31" kern="0">
-                <a:solidFill>
-                  <a:srgbClr val="D8D3C4"/>
-                </a:solidFill>
-                <a:latin typeface="Be Vietnam Pro" pitchFamily="34" charset="0"/>
-                <a:ea typeface="Be Vietnam Pro" pitchFamily="34" charset="-122"/>
-                <a:cs typeface="Be Vietnam Pro" pitchFamily="34" charset="-120"/>
-              </a:rPr>
-              <a:t> ra</a:t>
-            </a:r>
-            <a:r>
-              <a:rPr lang="en-US" sz="2100" dirty="0" spc="-8" kern="0">
-                <a:solidFill>
-                  <a:srgbClr val="D8D3C4"/>
-                </a:solidFill>
-                <a:latin typeface="Be Vietnam Pro" pitchFamily="34" charset="0"/>
-                <a:ea typeface="Be Vietnam Pro" pitchFamily="34" charset="-122"/>
-                <a:cs typeface="Be Vietnam Pro" pitchFamily="34" charset="-120"/>
-              </a:rPr>
-              <a:t> một</a:t>
-            </a:r>
-            <a:r>
-              <a:rPr lang="en-US" sz="2100" dirty="0" spc="-12" kern="0">
-                <a:solidFill>
-                  <a:srgbClr val="D8D3C4"/>
-                </a:solidFill>
-                <a:latin typeface="Be Vietnam Pro" pitchFamily="34" charset="0"/>
-                <a:ea typeface="Be Vietnam Pro" pitchFamily="34" charset="-122"/>
-                <a:cs typeface="Be Vietnam Pro" pitchFamily="34" charset="-120"/>
-              </a:rPr>
-              <a:t> dãy</a:t>
-            </a:r>
-            <a:r>
-              <a:rPr lang="en-US" sz="2100" dirty="0" spc="-9" kern="0">
-                <a:solidFill>
-                  <a:srgbClr val="D8D3C4"/>
-                </a:solidFill>
-                <a:latin typeface="Be Vietnam Pro" pitchFamily="34" charset="0"/>
-                <a:ea typeface="Be Vietnam Pro" pitchFamily="34" charset="-122"/>
-                <a:cs typeface="Be Vietnam Pro" pitchFamily="34" charset="-120"/>
-              </a:rPr>
-              <a:t> ngắn</a:t>
+              <a:t> bit</a:t>
             </a:r>
             <a:endParaRPr lang="en-US" sz="2100" dirty="0"/>
           </a:p>
@@ -9865,14 +9832,17 @@
           <a:ln/>
         </p:spPr>
         <p:txBody>
-          <a:bodyPr wrap="square" lIns="0" tIns="0" rIns="0" bIns="0" rtlCol="0" anchor="ctr"/>
+          <a:bodyPr wrap="square" lIns="0" tIns="11704" rIns="0" bIns="-11704" rtlCol="0" anchor="ctr"/>
           <a:lstStyle/>
           <a:p>
             <a:pPr algn="l" indent="0" marL="0">
+              <a:lnSpc>
+                <a:spcPts val="2415"/>
+              </a:lnSpc>
               <a:buNone/>
             </a:pPr>
             <a:r>
-              <a:rPr lang="en-US" sz="2400" b="1" dirty="0" spc="2" kern="0">
+              <a:rPr lang="en-US" sz="2100" b="1" dirty="0" spc="0" kern="0">
                 <a:solidFill>
                   <a:srgbClr val="FBF8F2"/>
                 </a:solidFill>
@@ -9883,7 +9853,7 @@
               <a:t>bí</a:t>
             </a:r>
             <a:r>
-              <a:rPr lang="en-US" sz="2400" b="1" dirty="0" spc="-7" kern="0">
+              <a:rPr lang="en-US" sz="2100" b="1" dirty="0" spc="-10" kern="0">
                 <a:solidFill>
                   <a:srgbClr val="FBF8F2"/>
                 </a:solidFill>
@@ -9893,7 +9863,38 @@
               </a:rPr>
               <a:t> mật</a:t>
             </a:r>
-            <a:endParaRPr lang="en-US" sz="2400" dirty="0"/>
+            <a:endParaRPr lang="en-US" sz="2100" dirty="0"/>
+          </a:p>
+          <a:p>
+            <a:pPr algn="l" indent="0" marL="0">
+              <a:lnSpc>
+                <a:spcPts val="2415"/>
+              </a:lnSpc>
+              <a:buNone/>
+            </a:pPr>
+            <a:r>
+              <a:rPr lang="en-US" sz="2100" b="1" dirty="0" spc="-1" kern="0">
+                <a:solidFill>
+                  <a:srgbClr val="FBF8F2"/>
+                </a:solidFill>
+                <a:latin typeface="Be Vietnam Pro" pitchFamily="34" charset="0"/>
+                <a:ea typeface="Be Vietnam Pro" pitchFamily="34" charset="-122"/>
+                <a:cs typeface="Be Vietnam Pro" pitchFamily="34" charset="-120"/>
+              </a:rPr>
+              <a:t>làm</a:t>
+            </a:r>
+            <a:r>
+              <a:rPr lang="en-US" sz="2100" b="1" dirty="0" spc="-8" kern="0">
+                <a:solidFill>
+                  <a:srgbClr val="FBF8F2"/>
+                </a:solidFill>
+                <a:latin typeface="Be Vietnam Pro" pitchFamily="34" charset="0"/>
+                <a:ea typeface="Be Vietnam Pro" pitchFamily="34" charset="-122"/>
+                <a:cs typeface="Be Vietnam Pro" pitchFamily="34" charset="-120"/>
+              </a:rPr>
+              <a:t> khóa</a:t>
+            </a:r>
+            <a:endParaRPr lang="en-US" sz="2100" dirty="0"/>
           </a:p>
         </p:txBody>
       </p:sp>
@@ -9906,7 +9907,7 @@
         <p:spPr>
           <a:xfrm>
             <a:off x="6324600" y="3600450"/>
-            <a:ext cx="1733550" cy="685800"/>
+            <a:ext cx="1447800" cy="628650"/>
           </a:xfrm>
           <a:prstGeom prst="line">
             <a:avLst/>
@@ -9931,7 +9932,7 @@
         <p:spPr>
           <a:xfrm flipV="1">
             <a:off x="4229100" y="4876800"/>
-            <a:ext cx="3829050" cy="628650"/>
+            <a:ext cx="3543300" cy="628650"/>
           </a:xfrm>
           <a:prstGeom prst="line">
             <a:avLst/>
@@ -9955,12 +9956,12 @@
         </p:nvSpPr>
         <p:spPr>
           <a:xfrm>
-            <a:off x="8191500" y="3762375"/>
-            <a:ext cx="2857500" cy="1619250"/>
+            <a:off x="7905750" y="3571875"/>
+            <a:ext cx="3429000" cy="2000250"/>
           </a:xfrm>
           <a:prstGeom prst="roundRect">
             <a:avLst>
-              <a:gd name="adj" fmla="val 14118"/>
+              <a:gd name="adj" fmla="val 11429"/>
             </a:avLst>
           </a:prstGeom>
           <a:solidFill>
@@ -9982,8 +9983,8 @@
         </p:nvSpPr>
         <p:spPr>
           <a:xfrm>
-            <a:off x="8191500" y="4000500"/>
-            <a:ext cx="2857500" cy="762000"/>
+            <a:off x="7905750" y="3733800"/>
+            <a:ext cx="3429000" cy="762000"/>
           </a:xfrm>
           <a:prstGeom prst="rect">
             <a:avLst/>
@@ -10021,8 +10022,8 @@
         </p:nvSpPr>
         <p:spPr>
           <a:xfrm>
-            <a:off x="8191500" y="4810125"/>
-            <a:ext cx="2857500" cy="381000"/>
+            <a:off x="8048625" y="4533900"/>
+            <a:ext cx="3143250" cy="857250"/>
           </a:xfrm>
           <a:prstGeom prst="rect">
             <a:avLst/>
@@ -10031,10 +10032,13 @@
           <a:ln/>
         </p:spPr>
         <p:txBody>
-          <a:bodyPr wrap="square" lIns="0" tIns="0" rIns="0" bIns="0" rtlCol="0" anchor="t"/>
+          <a:bodyPr wrap="square" lIns="0" tIns="10525" rIns="0" bIns="-10525" rtlCol="0" anchor="t"/>
           <a:lstStyle/>
           <a:p>
             <a:pPr algn="ctr" indent="0" marL="0">
+              <a:lnSpc>
+                <a:spcPts val="2535"/>
+              </a:lnSpc>
               <a:buNone/>
             </a:pPr>
             <a:r>
@@ -10046,10 +10050,10 @@
                 <a:ea typeface="Be Vietnam Pro" pitchFamily="34" charset="-122"/>
                 <a:cs typeface="Be Vietnam Pro" pitchFamily="34" charset="-120"/>
               </a:rPr>
-              <a:t>hàm</a:t>
-            </a:r>
-            <a:r>
-              <a:rPr lang="en-US" sz="1950" dirty="0" spc="-4" kern="0">
+              <a:t>mã</a:t>
+            </a:r>
+            <a:r>
+              <a:rPr lang="en-US" sz="1950" dirty="0" spc="-16" kern="0">
                 <a:solidFill>
                   <a:srgbClr val="6B6A66"/>
                 </a:solidFill>
@@ -10057,21 +10061,76 @@
                 <a:ea typeface="Be Vietnam Pro" pitchFamily="34" charset="-122"/>
                 <a:cs typeface="Be Vietnam Pro" pitchFamily="34" charset="-120"/>
               </a:rPr>
+              <a:t> xác</a:t>
+            </a:r>
+            <a:r>
+              <a:rPr lang="en-US" sz="1950" dirty="0" spc="4" kern="0">
+                <a:solidFill>
+                  <a:srgbClr val="6B6A66"/>
+                </a:solidFill>
+                <a:latin typeface="Be Vietnam Pro" pitchFamily="34" charset="0"/>
+                <a:ea typeface="Be Vietnam Pro" pitchFamily="34" charset="-122"/>
+                <a:cs typeface="Be Vietnam Pro" pitchFamily="34" charset="-120"/>
+              </a:rPr>
+              <a:t> thực,</a:t>
+            </a:r>
+            <a:r>
+              <a:rPr lang="en-US" sz="1950" dirty="0" spc="17" kern="0">
+                <a:solidFill>
+                  <a:srgbClr val="6B6A66"/>
+                </a:solidFill>
+                <a:latin typeface="Be Vietnam Pro" pitchFamily="34" charset="0"/>
+                <a:ea typeface="Be Vietnam Pro" pitchFamily="34" charset="-122"/>
+                <a:cs typeface="Be Vietnam Pro" pitchFamily="34" charset="-120"/>
+              </a:rPr>
+              <a:t> dựng</a:t>
+            </a:r>
+            <a:r>
+              <a:rPr lang="en-US" sz="1950" dirty="0" spc="-15" kern="0">
+                <a:solidFill>
+                  <a:srgbClr val="6B6A66"/>
+                </a:solidFill>
+                <a:latin typeface="Be Vietnam Pro" pitchFamily="34" charset="0"/>
+                <a:ea typeface="Be Vietnam Pro" pitchFamily="34" charset="-122"/>
+                <a:cs typeface="Be Vietnam Pro" pitchFamily="34" charset="-120"/>
+              </a:rPr>
+              <a:t> trên</a:t>
+            </a:r>
+            <a:r>
+              <a:rPr lang="en-US" sz="1950" dirty="0" spc="0" kern="0">
+                <a:solidFill>
+                  <a:srgbClr val="6B6A66"/>
+                </a:solidFill>
+                <a:latin typeface="Be Vietnam Pro" pitchFamily="34" charset="0"/>
+                <a:ea typeface="Be Vietnam Pro" pitchFamily="34" charset="-122"/>
+                <a:cs typeface="Be Vietnam Pro" pitchFamily="34" charset="-120"/>
+              </a:rPr>
+              <a:t> hàm</a:t>
+            </a:r>
+            <a:r>
+              <a:rPr lang="en-US" sz="1950" dirty="0" spc="-3" kern="0">
+                <a:solidFill>
+                  <a:srgbClr val="6B6A66"/>
+                </a:solidFill>
+                <a:latin typeface="Be Vietnam Pro" pitchFamily="34" charset="0"/>
+                <a:ea typeface="Be Vietnam Pro" pitchFamily="34" charset="-122"/>
+                <a:cs typeface="Be Vietnam Pro" pitchFamily="34" charset="-120"/>
+              </a:rPr>
               <a:t> băm</a:t>
             </a:r>
             <a:r>
+              <a:rPr lang="en-US" sz="1950" dirty="0" spc="-2" kern="0">
+                <a:solidFill>
+                  <a:srgbClr val="6B6A66"/>
+                </a:solidFill>
+                <a:latin typeface="Be Vietnam Pro" pitchFamily="34" charset="0"/>
+                <a:ea typeface="Be Vietnam Pro" pitchFamily="34" charset="-122"/>
+                <a:cs typeface="Be Vietnam Pro" pitchFamily="34" charset="-120"/>
+              </a:rPr>
+              <a:t> 256</a:t>
+            </a:r>
+            <a:r>
               <a:rPr lang="en-US" sz="1950" dirty="0" spc="-1" kern="0">
-                <a:solidFill>
-                  <a:srgbClr val="6B6A66"/>
-                </a:solidFill>
-                <a:latin typeface="Be Vietnam Pro" pitchFamily="34" charset="0"/>
-                <a:ea typeface="Be Vietnam Pro" pitchFamily="34" charset="-122"/>
-                <a:cs typeface="Be Vietnam Pro" pitchFamily="34" charset="-120"/>
-              </a:rPr>
-              <a:t> 256</a:t>
-            </a:r>
-            <a:r>
-              <a:rPr lang="en-US" sz="1950" dirty="0" spc="-2" kern="0">
                 <a:solidFill>
                   <a:srgbClr val="6B6A66"/>
                 </a:solidFill>
@@ -10093,8 +10152,8 @@
         </p:nvSpPr>
         <p:spPr>
           <a:xfrm>
-            <a:off x="11201400" y="4572000"/>
-            <a:ext cx="2019300" cy="0"/>
+            <a:off x="11487150" y="4572000"/>
+            <a:ext cx="1733550" cy="0"/>
           </a:xfrm>
           <a:prstGeom prst="line">
             <a:avLst/>
